--- a/Dia-8/Carrusel Suscripcion - FB 1080x1080.pptx
+++ b/Dia-8/Carrusel Suscripcion - FB 1080x1080.pptx
@@ -3089,7 +3089,7 @@
     <p:bg>
       <p:bgPr>
         <a:solidFill>
-          <a:srgbClr val="F5C13F"/>
+          <a:srgbClr val="14181F"/>
         </a:solidFill>
         <a:effectLst/>
       </p:bgPr>
@@ -3101,24 +3101,48 @@
         <p:nvPr/>
       </p:nvGrpSpPr>
       <p:grpSpPr/>
-      <p:sp>
-        <p:nvSpPr>
-          <p:cNvPr id="2" name="Oval 1"/>
+      <p:pic>
+        <p:nvPicPr>
+          <p:cNvPr id="2" name="Picture 1" descr="B_11_duo.png"/>
+          <p:cNvPicPr>
+            <a:picLocks noChangeAspect="1"/>
+          </p:cNvPicPr>
+          <p:nvPr/>
+        </p:nvPicPr>
+        <p:blipFill>
+          <a:blip r:embed="rId2"/>
+          <a:stretch>
+            <a:fillRect/>
+          </a:stretch>
+        </p:blipFill>
+        <p:spPr>
+          <a:xfrm>
+            <a:off x="0" y="0"/>
+            <a:ext cx="8229600" cy="8229600"/>
+          </a:xfrm>
+          <a:prstGeom prst="rect">
+            <a:avLst/>
+          </a:prstGeom>
+        </p:spPr>
+      </p:pic>
+      <p:sp>
+        <p:nvSpPr>
+          <p:cNvPr id="3" name="Rounded Rectangle 2"/>
           <p:cNvSpPr/>
           <p:nvPr/>
         </p:nvSpPr>
         <p:spPr>
           <a:xfrm>
-            <a:off x="4518051" y="2874172"/>
-            <a:ext cx="6748272" cy="8637788"/>
-          </a:xfrm>
-          <a:prstGeom prst="ellipse">
-            <a:avLst/>
+            <a:off x="777240" y="777240"/>
+            <a:ext cx="1767078" cy="373380"/>
+          </a:xfrm>
+          <a:prstGeom prst="roundRect">
+            <a:avLst>
+              <a:gd name="adj" fmla="val 50000"/>
+            </a:avLst>
           </a:prstGeom>
           <a:solidFill>
-            <a:srgbClr val="14181F">
-              <a:alpha val="16000"/>
-            </a:srgbClr>
+            <a:srgbClr val="F5C13F"/>
           </a:solidFill>
           <a:ln>
             <a:noFill/>
@@ -3140,23 +3164,32 @@
           </a:fontRef>
         </p:style>
         <p:txBody>
-          <a:bodyPr rtlCol="0" anchor="ctr"/>
+          <a:bodyPr rtlCol="0" anchor="ctr" wrap="none" lIns="128016" rIns="128016" tIns="18288" bIns="18288"/>
           <a:lstStyle/>
           <a:p>
             <a:pPr algn="ctr"/>
-          </a:p>
-        </p:txBody>
-      </p:sp>
-      <p:sp>
-        <p:nvSpPr>
-          <p:cNvPr id="3" name="TextBox 2"/>
+            <a:r>
+              <a:rPr sz="1500" b="1">
+                <a:solidFill>
+                  <a:srgbClr val="14181F"/>
+                </a:solidFill>
+                <a:latin typeface="Bricolage Grotesque"/>
+              </a:rPr>
+              <a:t>SUSCRIPCIÓN</a:t>
+            </a:r>
+          </a:p>
+        </p:txBody>
+      </p:sp>
+      <p:sp>
+        <p:nvSpPr>
+          <p:cNvPr id="4" name="TextBox 3"/>
           <p:cNvSpPr txBox="1"/>
           <p:nvPr/>
         </p:nvSpPr>
         <p:spPr>
           <a:xfrm>
-            <a:off x="777240" y="777240"/>
-            <a:ext cx="6675120" cy="457200"/>
+            <a:off x="777240" y="1435608"/>
+            <a:ext cx="6675120" cy="2292858"/>
           </a:xfrm>
           <a:prstGeom prst="rect">
             <a:avLst/>
@@ -3175,71 +3208,66 @@
               </a:lnSpc>
             </a:pPr>
             <a:r>
-              <a:rPr sz="1800" b="1">
+              <a:rPr sz="4200" b="1">
                 <a:solidFill>
-                  <a:srgbClr val="14181F"/>
+                  <a:srgbClr val="FFFFFF"/>
+                </a:solidFill>
+                <a:latin typeface="Bricolage Grotesque"/>
+              </a:rPr>
+              <a:t>Nunca más te quedes sin huevos 🥚</a:t>
+            </a:r>
+          </a:p>
+        </p:txBody>
+      </p:sp>
+      <p:sp>
+        <p:nvSpPr>
+          <p:cNvPr id="5" name="TextBox 4"/>
+          <p:cNvSpPr txBox="1"/>
+          <p:nvPr/>
+        </p:nvSpPr>
+        <p:spPr>
+          <a:xfrm>
+            <a:off x="777240" y="3728466"/>
+            <a:ext cx="6675120" cy="835660"/>
+          </a:xfrm>
+          <a:prstGeom prst="rect">
+            <a:avLst/>
+          </a:prstGeom>
+          <a:noFill/>
+        </p:spPr>
+        <p:txBody>
+          <a:bodyPr wrap="square" anchor="t" lIns="0" rIns="0" tIns="0" bIns="0">
+            <a:spAutoFit/>
+          </a:bodyPr>
+          <a:lstStyle/>
+          <a:p>
+            <a:pPr algn="l">
+              <a:lnSpc>
+                <a:spcPct val="110000"/>
+              </a:lnSpc>
+            </a:pPr>
+            <a:r>
+              <a:rPr sz="2200" b="0">
+                <a:solidFill>
+                  <a:srgbClr val="FFFFFF"/>
                 </a:solidFill>
                 <a:latin typeface="Hanken Grotesk"/>
               </a:rPr>
-              <a:t>SUSCRIPCIÓN</a:t>
-            </a:r>
-          </a:p>
-        </p:txBody>
-      </p:sp>
-      <p:sp>
-        <p:nvSpPr>
-          <p:cNvPr id="4" name="Rectangle 3"/>
-          <p:cNvSpPr/>
-          <p:nvPr/>
-        </p:nvSpPr>
-        <p:spPr>
-          <a:xfrm>
-            <a:off x="777240" y="1280160"/>
-            <a:ext cx="1371600" cy="146304"/>
-          </a:xfrm>
-          <a:prstGeom prst="rect">
-            <a:avLst/>
-          </a:prstGeom>
-          <a:solidFill>
-            <a:srgbClr val="14181F"/>
-          </a:solidFill>
-          <a:ln>
-            <a:noFill/>
-          </a:ln>
-          <a:effectLst/>
-        </p:spPr>
-        <p:style>
-          <a:lnRef idx="1">
-            <a:schemeClr val="accent1"/>
-          </a:lnRef>
-          <a:fillRef idx="3">
-            <a:schemeClr val="accent1"/>
-          </a:fillRef>
-          <a:effectRef idx="2">
-            <a:schemeClr val="accent1"/>
-          </a:effectRef>
-          <a:fontRef idx="minor">
-            <a:schemeClr val="lt1"/>
-          </a:fontRef>
-        </p:style>
-        <p:txBody>
-          <a:bodyPr rtlCol="0" anchor="ctr"/>
-          <a:lstStyle/>
-          <a:p>
-            <a:pPr algn="ctr"/>
-          </a:p>
-        </p:txBody>
-      </p:sp>
-      <p:sp>
-        <p:nvSpPr>
-          <p:cNvPr id="5" name="TextBox 4"/>
+              <a:t>Suscríbete y olvídate.</a:t>
+            </a:r>
+          </a:p>
+        </p:txBody>
+      </p:sp>
+      <p:sp>
+        <p:nvSpPr>
+          <p:cNvPr id="6" name="TextBox 5"/>
           <p:cNvSpPr txBox="1"/>
           <p:nvPr/>
         </p:nvSpPr>
         <p:spPr>
           <a:xfrm>
-            <a:off x="777240" y="1737360"/>
-            <a:ext cx="6675120" cy="4356608"/>
+            <a:off x="777240" y="7269480"/>
+            <a:ext cx="6675120" cy="548640"/>
           </a:xfrm>
           <a:prstGeom prst="rect">
             <a:avLst/>
@@ -3258,87 +3286,9 @@
               </a:lnSpc>
             </a:pPr>
             <a:r>
-              <a:rPr sz="6400" b="1">
-                <a:solidFill>
-                  <a:srgbClr val="14181F"/>
-                </a:solidFill>
-                <a:latin typeface="Bricolage Grotesque"/>
-              </a:rPr>
-              <a:t>Nunca más te quedes sin huevos 🥚</a:t>
-            </a:r>
-          </a:p>
-        </p:txBody>
-      </p:sp>
-      <p:sp>
-        <p:nvSpPr>
-          <p:cNvPr id="6" name="TextBox 5"/>
-          <p:cNvSpPr txBox="1"/>
-          <p:nvPr/>
-        </p:nvSpPr>
-        <p:spPr>
-          <a:xfrm>
-            <a:off x="777240" y="5877052"/>
-            <a:ext cx="6675120" cy="1118108"/>
-          </a:xfrm>
-          <a:prstGeom prst="rect">
-            <a:avLst/>
-          </a:prstGeom>
-          <a:noFill/>
-        </p:spPr>
-        <p:txBody>
-          <a:bodyPr wrap="square" anchor="t" lIns="0" rIns="0" tIns="0" bIns="0">
-            <a:spAutoFit/>
-          </a:bodyPr>
-          <a:lstStyle/>
-          <a:p>
-            <a:pPr algn="l">
-              <a:lnSpc>
-                <a:spcPct val="110000"/>
-              </a:lnSpc>
-            </a:pPr>
-            <a:r>
-              <a:rPr sz="2600" b="0">
-                <a:solidFill>
-                  <a:srgbClr val="14181F"/>
-                </a:solidFill>
-                <a:latin typeface="Hanken Grotesk"/>
-              </a:rPr>
-              <a:t>Suscríbete y olvídate.</a:t>
-            </a:r>
-          </a:p>
-        </p:txBody>
-      </p:sp>
-      <p:sp>
-        <p:nvSpPr>
-          <p:cNvPr id="7" name="TextBox 6"/>
-          <p:cNvSpPr txBox="1"/>
-          <p:nvPr/>
-        </p:nvSpPr>
-        <p:spPr>
-          <a:xfrm>
-            <a:off x="777240" y="7269480"/>
-            <a:ext cx="6675120" cy="548640"/>
-          </a:xfrm>
-          <a:prstGeom prst="rect">
-            <a:avLst/>
-          </a:prstGeom>
-          <a:noFill/>
-        </p:spPr>
-        <p:txBody>
-          <a:bodyPr wrap="square" anchor="t" lIns="0" rIns="0" tIns="0" bIns="0">
-            <a:spAutoFit/>
-          </a:bodyPr>
-          <a:lstStyle/>
-          <a:p>
-            <a:pPr algn="l">
-              <a:lnSpc>
-                <a:spcPct val="100000"/>
-              </a:lnSpc>
-            </a:pPr>
-            <a:r>
               <a:rPr sz="1800" b="1">
                 <a:solidFill>
-                  <a:srgbClr val="14181F"/>
+                  <a:srgbClr val="F5C13F"/>
                 </a:solidFill>
                 <a:latin typeface="Bricolage Grotesque"/>
               </a:rPr>
@@ -3347,7 +3297,7 @@
             <a:r>
               <a:rPr sz="1800" b="1">
                 <a:solidFill>
-                  <a:srgbClr val="14181F"/>
+                  <a:srgbClr val="FFFFFF"/>
                 </a:solidFill>
                 <a:latin typeface="Bricolage Grotesque"/>
               </a:rPr>
@@ -3358,7 +3308,7 @@
       </p:sp>
       <p:sp>
         <p:nvSpPr>
-          <p:cNvPr id="8" name="TextBox 7"/>
+          <p:cNvPr id="7" name="TextBox 6"/>
           <p:cNvSpPr txBox="1"/>
           <p:nvPr/>
         </p:nvSpPr>
@@ -3386,7 +3336,7 @@
             <a:r>
               <a:rPr sz="2000" b="1">
                 <a:solidFill>
-                  <a:srgbClr val="14181F"/>
+                  <a:srgbClr val="FFFFFF"/>
                 </a:solidFill>
                 <a:latin typeface="Bricolage Grotesque"/>
               </a:rPr>
@@ -3423,22 +3373,22 @@
       <p:grpSpPr/>
       <p:sp>
         <p:nvSpPr>
-          <p:cNvPr id="2" name="Oval 1"/>
+          <p:cNvPr id="2" name="Rounded Rectangle 1"/>
           <p:cNvSpPr/>
           <p:nvPr/>
         </p:nvSpPr>
         <p:spPr>
           <a:xfrm>
-            <a:off x="4518051" y="2874172"/>
-            <a:ext cx="6748272" cy="8637788"/>
-          </a:xfrm>
-          <a:prstGeom prst="ellipse">
-            <a:avLst/>
+            <a:off x="777240" y="1188720"/>
+            <a:ext cx="1767078" cy="373380"/>
+          </a:xfrm>
+          <a:prstGeom prst="roundRect">
+            <a:avLst>
+              <a:gd name="adj" fmla="val 50000"/>
+            </a:avLst>
           </a:prstGeom>
           <a:solidFill>
-            <a:srgbClr val="F5C13F">
-              <a:alpha val="12000"/>
-            </a:srgbClr>
+            <a:srgbClr val="F5C13F"/>
           </a:solidFill>
           <a:ln>
             <a:noFill/>
@@ -3460,25 +3410,73 @@
           </a:fontRef>
         </p:style>
         <p:txBody>
-          <a:bodyPr rtlCol="0" anchor="ctr"/>
+          <a:bodyPr rtlCol="0" anchor="ctr" wrap="none" lIns="128016" rIns="128016" tIns="18288" bIns="18288"/>
           <a:lstStyle/>
           <a:p>
             <a:pPr algn="ctr"/>
-          </a:p>
-        </p:txBody>
-      </p:sp>
-      <p:sp>
-        <p:nvSpPr>
-          <p:cNvPr id="3" name="Oval 2"/>
+            <a:r>
+              <a:rPr sz="1500" b="1">
+                <a:solidFill>
+                  <a:srgbClr val="14181F"/>
+                </a:solidFill>
+                <a:latin typeface="Bricolage Grotesque"/>
+              </a:rPr>
+              <a:t>FRECUENCIAS</a:t>
+            </a:r>
+          </a:p>
+        </p:txBody>
+      </p:sp>
+      <p:sp>
+        <p:nvSpPr>
+          <p:cNvPr id="3" name="TextBox 2"/>
+          <p:cNvSpPr txBox="1"/>
+          <p:nvPr/>
+        </p:nvSpPr>
+        <p:spPr>
+          <a:xfrm>
+            <a:off x="777240" y="1847088"/>
+            <a:ext cx="6675120" cy="1981199"/>
+          </a:xfrm>
+          <a:prstGeom prst="rect">
+            <a:avLst/>
+          </a:prstGeom>
+          <a:noFill/>
+        </p:spPr>
+        <p:txBody>
+          <a:bodyPr wrap="square" anchor="t" lIns="0" rIns="0" tIns="0" bIns="0">
+            <a:spAutoFit/>
+          </a:bodyPr>
+          <a:lstStyle/>
+          <a:p>
+            <a:pPr algn="l">
+              <a:lnSpc>
+                <a:spcPct val="90000"/>
+              </a:lnSpc>
+            </a:pPr>
+            <a:r>
+              <a:rPr sz="15000" b="1">
+                <a:solidFill>
+                  <a:srgbClr val="F5C13F"/>
+                </a:solidFill>
+                <a:latin typeface="Bricolage Grotesque"/>
+              </a:rPr>
+              <a:t>2</a:t>
+            </a:r>
+          </a:p>
+        </p:txBody>
+      </p:sp>
+      <p:sp>
+        <p:nvSpPr>
+          <p:cNvPr id="4" name="Rectangle 3"/>
           <p:cNvSpPr/>
           <p:nvPr/>
         </p:nvSpPr>
         <p:spPr>
           <a:xfrm>
-            <a:off x="777240" y="1280160"/>
-            <a:ext cx="3200400" cy="3200400"/>
-          </a:xfrm>
-          <a:prstGeom prst="ellipse">
+            <a:off x="777240" y="3938015"/>
+            <a:ext cx="1554480" cy="146304"/>
+          </a:xfrm>
+          <a:prstGeom prst="rect">
             <a:avLst/>
           </a:prstGeom>
           <a:solidFill>
@@ -3513,53 +3511,14 @@
       </p:sp>
       <p:sp>
         <p:nvSpPr>
-          <p:cNvPr id="4" name="TextBox 3"/>
-          <p:cNvSpPr txBox="1"/>
-          <p:nvPr/>
-        </p:nvSpPr>
-        <p:spPr>
-          <a:xfrm>
-            <a:off x="777240" y="1280160"/>
-            <a:ext cx="3200400" cy="3200400"/>
-          </a:xfrm>
-          <a:prstGeom prst="rect">
-            <a:avLst/>
-          </a:prstGeom>
-          <a:noFill/>
-        </p:spPr>
-        <p:txBody>
-          <a:bodyPr wrap="square" anchor="ctr" lIns="0" rIns="0" tIns="0" bIns="0">
-            <a:spAutoFit/>
-          </a:bodyPr>
-          <a:lstStyle/>
-          <a:p>
-            <a:pPr algn="ctr">
-              <a:lnSpc>
-                <a:spcPct val="90000"/>
-              </a:lnSpc>
-            </a:pPr>
-            <a:r>
-              <a:rPr sz="12000" b="1">
-                <a:solidFill>
-                  <a:srgbClr val="14181F"/>
-                </a:solidFill>
-                <a:latin typeface="Bricolage Grotesque"/>
-              </a:rPr>
-              <a:t>2</a:t>
-            </a:r>
-          </a:p>
-        </p:txBody>
-      </p:sp>
-      <p:sp>
-        <p:nvSpPr>
           <p:cNvPr id="5" name="TextBox 4"/>
           <p:cNvSpPr txBox="1"/>
           <p:nvPr/>
         </p:nvSpPr>
         <p:spPr>
           <a:xfrm>
-            <a:off x="777240" y="4937760"/>
-            <a:ext cx="6675120" cy="457200"/>
+            <a:off x="777240" y="4395215"/>
+            <a:ext cx="6675120" cy="2388107"/>
           </a:xfrm>
           <a:prstGeom prst="rect">
             <a:avLst/>
@@ -3578,46 +3537,7 @@
               </a:lnSpc>
             </a:pPr>
             <a:r>
-              <a:rPr sz="1800" b="1">
-                <a:solidFill>
-                  <a:srgbClr val="F5C13F"/>
-                </a:solidFill>
-                <a:latin typeface="Hanken Grotesk"/>
-              </a:rPr>
-              <a:t>FRECUENCIAS</a:t>
-            </a:r>
-          </a:p>
-        </p:txBody>
-      </p:sp>
-      <p:sp>
-        <p:nvSpPr>
-          <p:cNvPr id="6" name="TextBox 5"/>
-          <p:cNvSpPr txBox="1"/>
-          <p:nvPr/>
-        </p:nvSpPr>
-        <p:spPr>
-          <a:xfrm>
-            <a:off x="777240" y="5577840"/>
-            <a:ext cx="6675120" cy="2483358"/>
-          </a:xfrm>
-          <a:prstGeom prst="rect">
-            <a:avLst/>
-          </a:prstGeom>
-          <a:noFill/>
-        </p:spPr>
-        <p:txBody>
-          <a:bodyPr wrap="square" anchor="t" lIns="0" rIns="0" tIns="0" bIns="0">
-            <a:spAutoFit/>
-          </a:bodyPr>
-          <a:lstStyle/>
-          <a:p>
-            <a:pPr algn="l">
-              <a:lnSpc>
-                <a:spcPct val="100000"/>
-              </a:lnSpc>
-            </a:pPr>
-            <a:r>
-              <a:rPr sz="4600" b="1">
+              <a:rPr sz="4400" b="1">
                 <a:solidFill>
                   <a:srgbClr val="FFFFFF"/>
                 </a:solidFill>
@@ -3630,13 +3550,13 @@
       </p:sp>
       <p:sp>
         <p:nvSpPr>
-          <p:cNvPr id="7" name="TextBox 6"/>
+          <p:cNvPr id="6" name="TextBox 5"/>
           <p:cNvSpPr txBox="1"/>
           <p:nvPr/>
         </p:nvSpPr>
         <p:spPr>
           <a:xfrm>
-            <a:off x="777240" y="8061198"/>
+            <a:off x="777240" y="6783322"/>
             <a:ext cx="6675120" cy="899160"/>
           </a:xfrm>
           <a:prstGeom prst="rect">
@@ -3676,6 +3596,209 @@
 </file>
 
 <file path=ppt/slides/slide3.xml><?xml version="1.0" encoding="utf-8"?>
+<p:sld xmlns:a="http://schemas.openxmlformats.org/drawingml/2006/main" xmlns:p="http://schemas.openxmlformats.org/presentationml/2006/main" xmlns:r="http://schemas.openxmlformats.org/officeDocument/2006/relationships">
+  <p:cSld>
+    <p:bg>
+      <p:bgPr>
+        <a:solidFill>
+          <a:srgbClr val="FFFFFF"/>
+        </a:solidFill>
+        <a:effectLst/>
+      </p:bgPr>
+    </p:bg>
+    <p:spTree>
+      <p:nvGrpSpPr>
+        <p:cNvPr id="1" name=""/>
+        <p:cNvGrpSpPr/>
+        <p:nvPr/>
+      </p:nvGrpSpPr>
+      <p:grpSpPr/>
+      <p:sp>
+        <p:nvSpPr>
+          <p:cNvPr id="2" name="Rounded Rectangle 1"/>
+          <p:cNvSpPr/>
+          <p:nvPr/>
+        </p:nvSpPr>
+        <p:spPr>
+          <a:xfrm>
+            <a:off x="777240" y="777240"/>
+            <a:ext cx="2018538" cy="373380"/>
+          </a:xfrm>
+          <a:prstGeom prst="roundRect">
+            <a:avLst>
+              <a:gd name="adj" fmla="val 50000"/>
+            </a:avLst>
+          </a:prstGeom>
+          <a:solidFill>
+            <a:srgbClr val="F5C13F"/>
+          </a:solidFill>
+          <a:ln>
+            <a:noFill/>
+          </a:ln>
+          <a:effectLst/>
+        </p:spPr>
+        <p:style>
+          <a:lnRef idx="1">
+            <a:schemeClr val="accent1"/>
+          </a:lnRef>
+          <a:fillRef idx="3">
+            <a:schemeClr val="accent1"/>
+          </a:fillRef>
+          <a:effectRef idx="2">
+            <a:schemeClr val="accent1"/>
+          </a:effectRef>
+          <a:fontRef idx="minor">
+            <a:schemeClr val="lt1"/>
+          </a:fontRef>
+        </p:style>
+        <p:txBody>
+          <a:bodyPr rtlCol="0" anchor="ctr" wrap="none" lIns="128016" rIns="128016" tIns="18288" bIns="18288"/>
+          <a:lstStyle/>
+          <a:p>
+            <a:pPr algn="ctr"/>
+            <a:r>
+              <a:rPr sz="1500" b="1">
+                <a:solidFill>
+                  <a:srgbClr val="14181F"/>
+                </a:solidFill>
+                <a:latin typeface="Bricolage Grotesque"/>
+              </a:rPr>
+              <a:t>CÓMO FUNCIONA</a:t>
+            </a:r>
+          </a:p>
+        </p:txBody>
+      </p:sp>
+      <p:sp>
+        <p:nvSpPr>
+          <p:cNvPr id="3" name="Rectangle 2"/>
+          <p:cNvSpPr/>
+          <p:nvPr/>
+        </p:nvSpPr>
+        <p:spPr>
+          <a:xfrm>
+            <a:off x="777240" y="1748536"/>
+            <a:ext cx="1371600" cy="146304"/>
+          </a:xfrm>
+          <a:prstGeom prst="rect">
+            <a:avLst/>
+          </a:prstGeom>
+          <a:solidFill>
+            <a:srgbClr val="F5C13F"/>
+          </a:solidFill>
+          <a:ln>
+            <a:noFill/>
+          </a:ln>
+          <a:effectLst/>
+        </p:spPr>
+        <p:style>
+          <a:lnRef idx="1">
+            <a:schemeClr val="accent1"/>
+          </a:lnRef>
+          <a:fillRef idx="3">
+            <a:schemeClr val="accent1"/>
+          </a:fillRef>
+          <a:effectRef idx="2">
+            <a:schemeClr val="accent1"/>
+          </a:effectRef>
+          <a:fontRef idx="minor">
+            <a:schemeClr val="lt1"/>
+          </a:fontRef>
+        </p:style>
+        <p:txBody>
+          <a:bodyPr rtlCol="0" anchor="ctr"/>
+          <a:lstStyle/>
+          <a:p>
+            <a:pPr algn="ctr"/>
+          </a:p>
+        </p:txBody>
+      </p:sp>
+      <p:sp>
+        <p:nvSpPr>
+          <p:cNvPr id="4" name="TextBox 3"/>
+          <p:cNvSpPr txBox="1"/>
+          <p:nvPr/>
+        </p:nvSpPr>
+        <p:spPr>
+          <a:xfrm>
+            <a:off x="777240" y="2205736"/>
+            <a:ext cx="6675120" cy="3086607"/>
+          </a:xfrm>
+          <a:prstGeom prst="rect">
+            <a:avLst/>
+          </a:prstGeom>
+          <a:noFill/>
+        </p:spPr>
+        <p:txBody>
+          <a:bodyPr wrap="square" anchor="t" lIns="0" rIns="0" tIns="0" bIns="0">
+            <a:spAutoFit/>
+          </a:bodyPr>
+          <a:lstStyle/>
+          <a:p>
+            <a:pPr algn="l">
+              <a:lnSpc>
+                <a:spcPct val="100000"/>
+              </a:lnSpc>
+            </a:pPr>
+            <a:r>
+              <a:rPr sz="4400" b="1">
+                <a:solidFill>
+                  <a:srgbClr val="14181F"/>
+                </a:solidFill>
+                <a:latin typeface="Bricolage Grotesque"/>
+              </a:rPr>
+              <a:t>Te llega un recordatorio, pagas tú y listo.</a:t>
+            </a:r>
+          </a:p>
+        </p:txBody>
+      </p:sp>
+      <p:sp>
+        <p:nvSpPr>
+          <p:cNvPr id="5" name="TextBox 4"/>
+          <p:cNvSpPr txBox="1"/>
+          <p:nvPr/>
+        </p:nvSpPr>
+        <p:spPr>
+          <a:xfrm>
+            <a:off x="777240" y="5292343"/>
+            <a:ext cx="6675120" cy="1118108"/>
+          </a:xfrm>
+          <a:prstGeom prst="rect">
+            <a:avLst/>
+          </a:prstGeom>
+          <a:noFill/>
+        </p:spPr>
+        <p:txBody>
+          <a:bodyPr wrap="square" anchor="t" lIns="0" rIns="0" tIns="0" bIns="0">
+            <a:spAutoFit/>
+          </a:bodyPr>
+          <a:lstStyle/>
+          <a:p>
+            <a:pPr algn="l">
+              <a:lnSpc>
+                <a:spcPct val="110000"/>
+              </a:lnSpc>
+            </a:pPr>
+            <a:r>
+              <a:rPr sz="2600" b="0">
+                <a:solidFill>
+                  <a:srgbClr val="14181F"/>
+                </a:solidFill>
+                <a:latin typeface="Hanken Grotesk"/>
+              </a:rPr>
+              <a:t>Sin cobros automáticos.</a:t>
+            </a:r>
+          </a:p>
+        </p:txBody>
+      </p:sp>
+    </p:spTree>
+  </p:cSld>
+  <p:clrMapOvr>
+    <a:masterClrMapping/>
+  </p:clrMapOvr>
+</p:sld>
+</file>
+
+<file path=ppt/slides/slide4.xml><?xml version="1.0" encoding="utf-8"?>
 <p:sld xmlns:a="http://schemas.openxmlformats.org/drawingml/2006/main" xmlns:p="http://schemas.openxmlformats.org/presentationml/2006/main" xmlns:r="http://schemas.openxmlformats.org/officeDocument/2006/relationships">
   <p:cSld>
     <p:bg>
@@ -3693,40 +3816,115 @@
         <p:nvPr/>
       </p:nvGrpSpPr>
       <p:grpSpPr/>
-      <p:pic>
-        <p:nvPicPr>
-          <p:cNvPr id="2" name="Picture 1" descr="entrega_r8229600x4526280_center.png"/>
-          <p:cNvPicPr>
-            <a:picLocks noChangeAspect="1"/>
-          </p:cNvPicPr>
+      <p:sp>
+        <p:nvSpPr>
+          <p:cNvPr id="2" name="Rounded Rectangle 1"/>
+          <p:cNvSpPr/>
           <p:nvPr/>
-        </p:nvPicPr>
-        <p:blipFill>
-          <a:blip r:embed="rId2"/>
-          <a:stretch>
-            <a:fillRect/>
-          </a:stretch>
-        </p:blipFill>
-        <p:spPr>
-          <a:xfrm>
-            <a:off x="0" y="0"/>
-            <a:ext cx="8229600" cy="4526280"/>
+        </p:nvSpPr>
+        <p:spPr>
+          <a:xfrm>
+            <a:off x="777240" y="777240"/>
+            <a:ext cx="1389888" cy="373380"/>
+          </a:xfrm>
+          <a:prstGeom prst="roundRect">
+            <a:avLst>
+              <a:gd name="adj" fmla="val 50000"/>
+            </a:avLst>
+          </a:prstGeom>
+          <a:solidFill>
+            <a:srgbClr val="F5C13F"/>
+          </a:solidFill>
+          <a:ln>
+            <a:noFill/>
+          </a:ln>
+          <a:effectLst/>
+        </p:spPr>
+        <p:style>
+          <a:lnRef idx="1">
+            <a:schemeClr val="accent1"/>
+          </a:lnRef>
+          <a:fillRef idx="3">
+            <a:schemeClr val="accent1"/>
+          </a:fillRef>
+          <a:effectRef idx="2">
+            <a:schemeClr val="accent1"/>
+          </a:effectRef>
+          <a:fontRef idx="minor">
+            <a:schemeClr val="lt1"/>
+          </a:fontRef>
+        </p:style>
+        <p:txBody>
+          <a:bodyPr rtlCol="0" anchor="ctr" wrap="none" lIns="128016" rIns="128016" tIns="18288" bIns="18288"/>
+          <a:lstStyle/>
+          <a:p>
+            <a:pPr algn="ctr"/>
+            <a:r>
+              <a:rPr sz="1500" b="1">
+                <a:solidFill>
+                  <a:srgbClr val="14181F"/>
+                </a:solidFill>
+                <a:latin typeface="Bricolage Grotesque"/>
+              </a:rPr>
+              <a:t>FLEXIBLE</a:t>
+            </a:r>
+          </a:p>
+        </p:txBody>
+      </p:sp>
+      <p:sp>
+        <p:nvSpPr>
+          <p:cNvPr id="3" name="Rectangle 2"/>
+          <p:cNvSpPr/>
+          <p:nvPr/>
+        </p:nvSpPr>
+        <p:spPr>
+          <a:xfrm>
+            <a:off x="777240" y="1685036"/>
+            <a:ext cx="1371600" cy="146304"/>
           </a:xfrm>
           <a:prstGeom prst="rect">
             <a:avLst/>
           </a:prstGeom>
-        </p:spPr>
-      </p:pic>
-      <p:sp>
-        <p:nvSpPr>
-          <p:cNvPr id="3" name="TextBox 2"/>
+          <a:solidFill>
+            <a:srgbClr val="F5C13F"/>
+          </a:solidFill>
+          <a:ln>
+            <a:noFill/>
+          </a:ln>
+          <a:effectLst/>
+        </p:spPr>
+        <p:style>
+          <a:lnRef idx="1">
+            <a:schemeClr val="accent1"/>
+          </a:lnRef>
+          <a:fillRef idx="3">
+            <a:schemeClr val="accent1"/>
+          </a:fillRef>
+          <a:effectRef idx="2">
+            <a:schemeClr val="accent1"/>
+          </a:effectRef>
+          <a:fontRef idx="minor">
+            <a:schemeClr val="lt1"/>
+          </a:fontRef>
+        </p:style>
+        <p:txBody>
+          <a:bodyPr rtlCol="0" anchor="ctr"/>
+          <a:lstStyle/>
+          <a:p>
+            <a:pPr algn="ctr"/>
+          </a:p>
+        </p:txBody>
+      </p:sp>
+      <p:sp>
+        <p:nvSpPr>
+          <p:cNvPr id="4" name="TextBox 3"/>
           <p:cNvSpPr txBox="1"/>
           <p:nvPr/>
         </p:nvSpPr>
         <p:spPr>
           <a:xfrm>
-            <a:off x="777240" y="4983480"/>
-            <a:ext cx="6675120" cy="457200"/>
+            <a:off x="777240" y="2142236"/>
+            <a:ext cx="6675120" cy="3213608"/>
           </a:xfrm>
           <a:prstGeom prst="rect">
             <a:avLst/>
@@ -3745,52 +3943,13 @@
               </a:lnSpc>
             </a:pPr>
             <a:r>
-              <a:rPr sz="1800" b="1">
-                <a:solidFill>
-                  <a:srgbClr val="F5C13F"/>
-                </a:solidFill>
-                <a:latin typeface="Hanken Grotesk"/>
-              </a:rPr>
-              <a:t>CÓMO FUNCIONA</a:t>
-            </a:r>
-          </a:p>
-        </p:txBody>
-      </p:sp>
-      <p:sp>
-        <p:nvSpPr>
-          <p:cNvPr id="4" name="TextBox 3"/>
-          <p:cNvSpPr txBox="1"/>
-          <p:nvPr/>
-        </p:nvSpPr>
-        <p:spPr>
-          <a:xfrm>
-            <a:off x="777240" y="5623560"/>
-            <a:ext cx="6675120" cy="2102358"/>
-          </a:xfrm>
-          <a:prstGeom prst="rect">
-            <a:avLst/>
-          </a:prstGeom>
-          <a:noFill/>
-        </p:spPr>
-        <p:txBody>
-          <a:bodyPr wrap="square" anchor="t" lIns="0" rIns="0" tIns="0" bIns="0">
-            <a:spAutoFit/>
-          </a:bodyPr>
-          <a:lstStyle/>
-          <a:p>
-            <a:pPr algn="l">
-              <a:lnSpc>
-                <a:spcPct val="100000"/>
-              </a:lnSpc>
-            </a:pPr>
-            <a:r>
-              <a:rPr sz="3800" b="1">
+              <a:rPr sz="4600" b="1">
                 <a:solidFill>
                   <a:srgbClr val="FFFFFF"/>
                 </a:solidFill>
                 <a:latin typeface="Bricolage Grotesque"/>
               </a:rPr>
-              <a:t>Te llega un recordatorio, pagas tú y listo.</a:t>
+              <a:t>Pausa, cambia o cancela cuando quieras.</a:t>
             </a:r>
           </a:p>
         </p:txBody>
@@ -3803,8 +3962,8 @@
         </p:nvSpPr>
         <p:spPr>
           <a:xfrm>
-            <a:off x="777240" y="7725918"/>
-            <a:ext cx="6675120" cy="899160"/>
+            <a:off x="777240" y="5355844"/>
+            <a:ext cx="6675120" cy="1118108"/>
           </a:xfrm>
           <a:prstGeom prst="rect">
             <a:avLst/>
@@ -3823,13 +3982,13 @@
               </a:lnSpc>
             </a:pPr>
             <a:r>
-              <a:rPr sz="2400" b="0">
+              <a:rPr sz="2600" b="0">
                 <a:solidFill>
                   <a:srgbClr val="FFFFFF"/>
                 </a:solidFill>
                 <a:latin typeface="Hanken Grotesk"/>
               </a:rPr>
-              <a:t>Sin cobros automáticos.</a:t>
+              <a:t>Sin penalidad.</a:t>
             </a:r>
           </a:p>
         </p:txBody>
@@ -3842,13 +4001,13 @@
 </p:sld>
 </file>
 
-<file path=ppt/slides/slide4.xml><?xml version="1.0" encoding="utf-8"?>
+<file path=ppt/slides/slide5.xml><?xml version="1.0" encoding="utf-8"?>
 <p:sld xmlns:a="http://schemas.openxmlformats.org/drawingml/2006/main" xmlns:p="http://schemas.openxmlformats.org/presentationml/2006/main" xmlns:r="http://schemas.openxmlformats.org/officeDocument/2006/relationships">
   <p:cSld>
     <p:bg>
       <p:bgPr>
         <a:solidFill>
-          <a:srgbClr val="FFFFFF"/>
+          <a:srgbClr val="F5C13F"/>
         </a:solidFill>
         <a:effectLst/>
       </p:bgPr>
@@ -3862,14 +4021,69 @@
       <p:grpSpPr/>
       <p:sp>
         <p:nvSpPr>
-          <p:cNvPr id="2" name="TextBox 1"/>
+          <p:cNvPr id="2" name="Rounded Rectangle 1"/>
+          <p:cNvSpPr/>
+          <p:nvPr/>
+        </p:nvSpPr>
+        <p:spPr>
+          <a:xfrm>
+            <a:off x="3042666" y="1819402"/>
+            <a:ext cx="2144268" cy="373380"/>
+          </a:xfrm>
+          <a:prstGeom prst="roundRect">
+            <a:avLst>
+              <a:gd name="adj" fmla="val 50000"/>
+            </a:avLst>
+          </a:prstGeom>
+          <a:solidFill>
+            <a:srgbClr val="14181F"/>
+          </a:solidFill>
+          <a:ln>
+            <a:noFill/>
+          </a:ln>
+          <a:effectLst/>
+        </p:spPr>
+        <p:style>
+          <a:lnRef idx="1">
+            <a:schemeClr val="accent1"/>
+          </a:lnRef>
+          <a:fillRef idx="3">
+            <a:schemeClr val="accent1"/>
+          </a:fillRef>
+          <a:effectRef idx="2">
+            <a:schemeClr val="accent1"/>
+          </a:effectRef>
+          <a:fontRef idx="minor">
+            <a:schemeClr val="lt1"/>
+          </a:fontRef>
+        </p:style>
+        <p:txBody>
+          <a:bodyPr rtlCol="0" anchor="ctr" wrap="none" lIns="128016" rIns="128016" tIns="18288" bIns="18288"/>
+          <a:lstStyle/>
+          <a:p>
+            <a:pPr algn="ctr"/>
+            <a:r>
+              <a:rPr sz="1500" b="1">
+                <a:solidFill>
+                  <a:srgbClr val="F5C13F"/>
+                </a:solidFill>
+                <a:latin typeface="Bricolage Grotesque"/>
+              </a:rPr>
+              <a:t>¿CUÁNTO PEDIR?</a:t>
+            </a:r>
+          </a:p>
+        </p:txBody>
+      </p:sp>
+      <p:sp>
+        <p:nvSpPr>
+          <p:cNvPr id="3" name="TextBox 2"/>
           <p:cNvSpPr txBox="1"/>
           <p:nvPr/>
         </p:nvSpPr>
         <p:spPr>
           <a:xfrm>
-            <a:off x="777240" y="1885442"/>
-            <a:ext cx="6675120" cy="3340608"/>
+            <a:off x="777240" y="2477770"/>
+            <a:ext cx="6675120" cy="2832607"/>
           </a:xfrm>
           <a:prstGeom prst="rect">
             <a:avLst/>
@@ -3888,26 +4102,26 @@
               </a:lnSpc>
             </a:pPr>
             <a:r>
-              <a:rPr sz="4800" b="1">
+              <a:rPr sz="4000" b="1">
                 <a:solidFill>
                   <a:srgbClr val="14181F"/>
                 </a:solidFill>
                 <a:latin typeface="Bricolage Grotesque"/>
               </a:rPr>
-              <a:t>Pausa, cambia o cancela cuando quieras.</a:t>
-            </a:r>
-          </a:p>
-        </p:txBody>
-      </p:sp>
-      <p:sp>
-        <p:nvSpPr>
-          <p:cNvPr id="3" name="TextBox 2"/>
+              <a:t>La calculadora te recomienda cantidad y frecuencia.</a:t>
+            </a:r>
+          </a:p>
+        </p:txBody>
+      </p:sp>
+      <p:sp>
+        <p:nvSpPr>
+          <p:cNvPr id="4" name="TextBox 3"/>
           <p:cNvSpPr txBox="1"/>
           <p:nvPr/>
         </p:nvSpPr>
         <p:spPr>
           <a:xfrm>
-            <a:off x="777240" y="5226050"/>
+            <a:off x="777240" y="5310377"/>
             <a:ext cx="6675120" cy="1118108"/>
           </a:xfrm>
           <a:prstGeom prst="rect">
@@ -3933,7 +4147,7 @@
                 </a:solidFill>
                 <a:latin typeface="Hanken Grotesk"/>
               </a:rPr>
-              <a:t>Sin penalidad.</a:t>
+              <a:t>En huevera.cl/#calculadora.</a:t>
             </a:r>
           </a:p>
         </p:txBody>
@@ -3946,7 +4160,7 @@
 </p:sld>
 </file>
 
-<file path=ppt/slides/slide5.xml><?xml version="1.0" encoding="utf-8"?>
+<file path=ppt/slides/slide6.xml><?xml version="1.0" encoding="utf-8"?>
 <p:sld xmlns:a="http://schemas.openxmlformats.org/drawingml/2006/main" xmlns:p="http://schemas.openxmlformats.org/presentationml/2006/main" xmlns:r="http://schemas.openxmlformats.org/officeDocument/2006/relationships">
   <p:cSld>
     <p:bg>
@@ -3966,165 +4180,22 @@
       <p:grpSpPr/>
       <p:sp>
         <p:nvSpPr>
-          <p:cNvPr id="2" name="TextBox 1"/>
-          <p:cNvSpPr txBox="1"/>
-          <p:nvPr/>
-        </p:nvSpPr>
-        <p:spPr>
-          <a:xfrm>
-            <a:off x="777240" y="777240"/>
-            <a:ext cx="6675120" cy="457200"/>
-          </a:xfrm>
-          <a:prstGeom prst="rect">
-            <a:avLst/>
-          </a:prstGeom>
-          <a:noFill/>
-        </p:spPr>
-        <p:txBody>
-          <a:bodyPr wrap="square" anchor="t" lIns="0" rIns="0" tIns="0" bIns="0">
-            <a:spAutoFit/>
-          </a:bodyPr>
-          <a:lstStyle/>
-          <a:p>
-            <a:pPr algn="l">
-              <a:lnSpc>
-                <a:spcPct val="100000"/>
-              </a:lnSpc>
-            </a:pPr>
-            <a:r>
-              <a:rPr sz="1800" b="1">
-                <a:solidFill>
-                  <a:srgbClr val="F5C13F"/>
-                </a:solidFill>
-                <a:latin typeface="Hanken Grotesk"/>
-              </a:rPr>
-              <a:t>¿CUÁNTO PEDIR?</a:t>
-            </a:r>
-          </a:p>
-        </p:txBody>
-      </p:sp>
-      <p:sp>
-        <p:nvSpPr>
-          <p:cNvPr id="3" name="TextBox 2"/>
-          <p:cNvSpPr txBox="1"/>
-          <p:nvPr/>
-        </p:nvSpPr>
-        <p:spPr>
-          <a:xfrm>
-            <a:off x="777240" y="1417320"/>
-            <a:ext cx="6675120" cy="2959607"/>
-          </a:xfrm>
-          <a:prstGeom prst="rect">
-            <a:avLst/>
-          </a:prstGeom>
-          <a:noFill/>
-        </p:spPr>
-        <p:txBody>
-          <a:bodyPr wrap="square" anchor="t" lIns="0" rIns="0" tIns="0" bIns="0">
-            <a:spAutoFit/>
-          </a:bodyPr>
-          <a:lstStyle/>
-          <a:p>
-            <a:pPr algn="l">
-              <a:lnSpc>
-                <a:spcPct val="100000"/>
-              </a:lnSpc>
-            </a:pPr>
-            <a:r>
-              <a:rPr sz="4200" b="1">
-                <a:solidFill>
-                  <a:srgbClr val="FFFFFF"/>
-                </a:solidFill>
-                <a:latin typeface="Bricolage Grotesque"/>
-              </a:rPr>
-              <a:t>La calculadora te recomienda cantidad y frecuencia.</a:t>
-            </a:r>
-          </a:p>
-        </p:txBody>
-      </p:sp>
-      <p:sp>
-        <p:nvSpPr>
-          <p:cNvPr id="4" name="TextBox 3"/>
-          <p:cNvSpPr txBox="1"/>
-          <p:nvPr/>
-        </p:nvSpPr>
-        <p:spPr>
-          <a:xfrm>
-            <a:off x="777240" y="4376927"/>
-            <a:ext cx="6675120" cy="835660"/>
-          </a:xfrm>
-          <a:prstGeom prst="rect">
-            <a:avLst/>
-          </a:prstGeom>
-          <a:noFill/>
-        </p:spPr>
-        <p:txBody>
-          <a:bodyPr wrap="square" anchor="t" lIns="0" rIns="0" tIns="0" bIns="0">
-            <a:spAutoFit/>
-          </a:bodyPr>
-          <a:lstStyle/>
-          <a:p>
-            <a:pPr algn="l">
-              <a:lnSpc>
-                <a:spcPct val="110000"/>
-              </a:lnSpc>
-            </a:pPr>
-            <a:r>
-              <a:rPr sz="2200" b="0">
-                <a:solidFill>
-                  <a:srgbClr val="FFFFFF"/>
-                </a:solidFill>
-                <a:latin typeface="Hanken Grotesk"/>
-              </a:rPr>
-              <a:t>En huevera.cl/#calculadora.</a:t>
-            </a:r>
-          </a:p>
-        </p:txBody>
-      </p:sp>
-    </p:spTree>
-  </p:cSld>
-  <p:clrMapOvr>
-    <a:masterClrMapping/>
-  </p:clrMapOvr>
-</p:sld>
-</file>
-
-<file path=ppt/slides/slide6.xml><?xml version="1.0" encoding="utf-8"?>
-<p:sld xmlns:a="http://schemas.openxmlformats.org/drawingml/2006/main" xmlns:p="http://schemas.openxmlformats.org/presentationml/2006/main" xmlns:r="http://schemas.openxmlformats.org/officeDocument/2006/relationships">
-  <p:cSld>
-    <p:bg>
-      <p:bgPr>
-        <a:solidFill>
-          <a:srgbClr val="F5C13F"/>
-        </a:solidFill>
-        <a:effectLst/>
-      </p:bgPr>
-    </p:bg>
-    <p:spTree>
-      <p:nvGrpSpPr>
-        <p:cNvPr id="1" name=""/>
-        <p:cNvGrpSpPr/>
-        <p:nvPr/>
-      </p:nvGrpSpPr>
-      <p:grpSpPr/>
-      <p:sp>
-        <p:nvSpPr>
-          <p:cNvPr id="2" name="Oval 1"/>
+          <p:cNvPr id="2" name="Rounded Rectangle 1"/>
           <p:cNvSpPr/>
           <p:nvPr/>
         </p:nvSpPr>
         <p:spPr>
           <a:xfrm>
-            <a:off x="-3036722" y="-2936847"/>
-            <a:ext cx="6748272" cy="8637788"/>
-          </a:xfrm>
-          <a:prstGeom prst="ellipse">
-            <a:avLst/>
+            <a:off x="777240" y="777240"/>
+            <a:ext cx="1389888" cy="373380"/>
+          </a:xfrm>
+          <a:prstGeom prst="roundRect">
+            <a:avLst>
+              <a:gd name="adj" fmla="val 50000"/>
+            </a:avLst>
           </a:prstGeom>
           <a:solidFill>
-            <a:srgbClr val="14181F">
-              <a:alpha val="16000"/>
-            </a:srgbClr>
+            <a:srgbClr val="F5C13F"/>
           </a:solidFill>
           <a:ln>
             <a:noFill/>
@@ -4146,10 +4217,19 @@
           </a:fontRef>
         </p:style>
         <p:txBody>
-          <a:bodyPr rtlCol="0" anchor="ctr"/>
+          <a:bodyPr rtlCol="0" anchor="ctr" wrap="none" lIns="128016" rIns="128016" tIns="18288" bIns="18288"/>
           <a:lstStyle/>
           <a:p>
             <a:pPr algn="ctr"/>
+            <a:r>
+              <a:rPr sz="1500" b="1">
+                <a:solidFill>
+                  <a:srgbClr val="14181F"/>
+                </a:solidFill>
+                <a:latin typeface="Bricolage Grotesque"/>
+              </a:rPr>
+              <a:t>ACTÍVALA</a:t>
+            </a:r>
           </a:p>
         </p:txBody>
       </p:sp>
@@ -4161,14 +4241,14 @@
         </p:nvSpPr>
         <p:spPr>
           <a:xfrm>
-            <a:off x="777240" y="1764411"/>
+            <a:off x="777240" y="1907286"/>
             <a:ext cx="1371600" cy="146304"/>
           </a:xfrm>
           <a:prstGeom prst="rect">
             <a:avLst/>
           </a:prstGeom>
           <a:solidFill>
-            <a:srgbClr val="14181F"/>
+            <a:srgbClr val="F5C13F"/>
           </a:solidFill>
           <a:ln>
             <a:noFill/>
@@ -4205,8 +4285,8 @@
         </p:nvSpPr>
         <p:spPr>
           <a:xfrm>
-            <a:off x="777240" y="2221611"/>
-            <a:ext cx="6675120" cy="3054858"/>
+            <a:off x="777240" y="2364486"/>
+            <a:ext cx="6675120" cy="2769108"/>
           </a:xfrm>
           <a:prstGeom prst="rect">
             <a:avLst/>
@@ -4225,9 +4305,9 @@
               </a:lnSpc>
             </a:pPr>
             <a:r>
-              <a:rPr sz="5800" b="1">
+              <a:rPr sz="5200" b="1">
                 <a:solidFill>
-                  <a:srgbClr val="14181F"/>
+                  <a:srgbClr val="FFFFFF"/>
                 </a:solidFill>
                 <a:latin typeface="Bricolage Grotesque"/>
               </a:rPr>
@@ -4266,7 +4346,7 @@
             <a:r>
               <a:rPr sz="1800" b="1">
                 <a:solidFill>
-                  <a:srgbClr val="14181F"/>
+                  <a:srgbClr val="F5C13F"/>
                 </a:solidFill>
                 <a:latin typeface="Bricolage Grotesque"/>
               </a:rPr>
@@ -4275,7 +4355,7 @@
             <a:r>
               <a:rPr sz="1800" b="1">
                 <a:solidFill>
-                  <a:srgbClr val="14181F"/>
+                  <a:srgbClr val="FFFFFF"/>
                 </a:solidFill>
                 <a:latin typeface="Bricolage Grotesque"/>
               </a:rPr>
